--- a/test-corpus/word-verification/timeline.pptx
+++ b/test-corpus/word-verification/timeline.pptx
@@ -144,8 +144,8 @@
         </p:nvSpPr>
         <p:spPr>
           <a:xfrm>
-            <a:off x="1925256" y="1198703"/>
-            <a:ext cx="8341489" cy="498676"/>
+            <a:off x="457200" y="1592845"/>
+            <a:ext cx="7034784" cy="420558"/>
           </a:xfrm>
           <a:prstGeom prst="rect">
             <a:avLst/>
@@ -168,7 +168,7 @@
               </a:spcAft>
             </a:pPr>
             <a:r>
-              <a:rPr lang="en-US" b="1" sz="1309" dirty="0">
+              <a:rPr lang="en-US" b="1" sz="1104" dirty="0">
                 <a:solidFill>
                   <a:srgbClr val="000000"/>
                 </a:solidFill>
@@ -186,8 +186,8 @@
         </p:nvSpPr>
         <p:spPr>
           <a:xfrm>
-            <a:off x="2265262" y="1867382"/>
-            <a:ext cx="3762737" cy="385341"/>
+            <a:off x="743944" y="2156775"/>
+            <a:ext cx="3173299" cy="324976"/>
           </a:xfrm>
           <a:prstGeom prst="rect">
             <a:avLst/>
@@ -212,7 +212,7 @@
               </a:spcAft>
             </a:pPr>
             <a:r>
-              <a:rPr lang="en-US" b="1" sz="1309" dirty="0">
+              <a:rPr lang="en-US" b="1" sz="1104" dirty="0">
                 <a:solidFill>
                   <a:srgbClr val="FFFFFF"/>
                 </a:solidFill>
@@ -230,8 +230,8 @@
         </p:nvSpPr>
         <p:spPr>
           <a:xfrm>
-            <a:off x="6164001" y="1867382"/>
-            <a:ext cx="3762737" cy="385341"/>
+            <a:off x="4031941" y="2156775"/>
+            <a:ext cx="3173299" cy="324976"/>
           </a:xfrm>
           <a:prstGeom prst="rect">
             <a:avLst/>
@@ -256,7 +256,7 @@
               </a:spcAft>
             </a:pPr>
             <a:r>
-              <a:rPr lang="en-US" b="1" sz="1309" dirty="0">
+              <a:rPr lang="en-US" b="1" sz="1104" dirty="0">
                 <a:solidFill>
                   <a:srgbClr val="FFFFFF"/>
                 </a:solidFill>
@@ -274,8 +274,8 @@
         </p:nvSpPr>
         <p:spPr>
           <a:xfrm>
-            <a:off x="2265262" y="2343391"/>
-            <a:ext cx="1813367" cy="419341"/>
+            <a:off x="743944" y="2558216"/>
+            <a:ext cx="1529301" cy="353651"/>
           </a:xfrm>
           <a:prstGeom prst="rect">
             <a:avLst/>
@@ -300,7 +300,7 @@
               </a:spcAft>
             </a:pPr>
             <a:r>
-              <a:rPr lang="en-US" b="1" sz="1309" dirty="0">
+              <a:rPr lang="en-US" b="1" sz="1104" dirty="0">
                 <a:solidFill>
                   <a:srgbClr val="000000"/>
                 </a:solidFill>
@@ -318,8 +318,8 @@
         </p:nvSpPr>
         <p:spPr>
           <a:xfrm>
-            <a:off x="4214632" y="2343391"/>
-            <a:ext cx="1813367" cy="419341"/>
+            <a:off x="2387942" y="2558216"/>
+            <a:ext cx="1529301" cy="353651"/>
           </a:xfrm>
           <a:prstGeom prst="rect">
             <a:avLst/>
@@ -344,7 +344,7 @@
               </a:spcAft>
             </a:pPr>
             <a:r>
-              <a:rPr lang="en-US" b="1" sz="1309" dirty="0">
+              <a:rPr lang="en-US" b="1" sz="1104" dirty="0">
                 <a:solidFill>
                   <a:srgbClr val="000000"/>
                 </a:solidFill>
@@ -362,8 +362,8 @@
         </p:nvSpPr>
         <p:spPr>
           <a:xfrm>
-            <a:off x="6164001" y="2343391"/>
-            <a:ext cx="1813367" cy="419341"/>
+            <a:off x="4031941" y="2558216"/>
+            <a:ext cx="1529301" cy="353651"/>
           </a:xfrm>
           <a:prstGeom prst="rect">
             <a:avLst/>
@@ -388,7 +388,7 @@
               </a:spcAft>
             </a:pPr>
             <a:r>
-              <a:rPr lang="en-US" b="1" sz="1309" dirty="0">
+              <a:rPr lang="en-US" b="1" sz="1104" dirty="0">
                 <a:solidFill>
                   <a:srgbClr val="000000"/>
                 </a:solidFill>
@@ -406,8 +406,8 @@
         </p:nvSpPr>
         <p:spPr>
           <a:xfrm>
-            <a:off x="8113371" y="2343391"/>
-            <a:ext cx="1813367" cy="419341"/>
+            <a:off x="5675939" y="2558216"/>
+            <a:ext cx="1529301" cy="353651"/>
           </a:xfrm>
           <a:prstGeom prst="rect">
             <a:avLst/>
@@ -432,7 +432,7 @@
               </a:spcAft>
             </a:pPr>
             <a:r>
-              <a:rPr lang="en-US" b="1" sz="1309" dirty="0">
+              <a:rPr lang="en-US" b="1" sz="1104" dirty="0">
                 <a:solidFill>
                   <a:srgbClr val="000000"/>
                 </a:solidFill>
@@ -450,8 +450,8 @@
         </p:nvSpPr>
         <p:spPr>
           <a:xfrm>
-            <a:off x="2265262" y="2762732"/>
-            <a:ext cx="7661476" cy="68001"/>
+            <a:off x="743944" y="2911867"/>
+            <a:ext cx="6461296" cy="57349"/>
           </a:xfrm>
           <a:prstGeom prst="rect">
             <a:avLst/>
@@ -472,8 +472,8 @@
         </p:nvSpPr>
         <p:spPr>
           <a:xfrm>
-            <a:off x="2265262" y="2921402"/>
-            <a:ext cx="1813367" cy="997352"/>
+            <a:off x="743944" y="3045681"/>
+            <a:ext cx="1529301" cy="841115"/>
           </a:xfrm>
           <a:prstGeom prst="rect">
             <a:avLst/>
@@ -498,7 +498,7 @@
               </a:spcAft>
             </a:pPr>
             <a:r>
-              <a:rPr lang="en-US" sz="1309" dirty="0">
+              <a:rPr lang="en-US" sz="1104" dirty="0">
                 <a:solidFill>
                   <a:srgbClr val="000000"/>
                 </a:solidFill>
@@ -516,7 +516,7 @@
               </a:spcAft>
             </a:pPr>
             <a:r>
-              <a:rPr lang="en-US" sz="1309" dirty="0">
+              <a:rPr lang="en-US" sz="1104" dirty="0">
                 <a:solidFill>
                   <a:srgbClr val="000000"/>
                 </a:solidFill>
@@ -534,7 +534,7 @@
               </a:spcAft>
             </a:pPr>
             <a:r>
-              <a:rPr lang="en-US" sz="1309" dirty="0">
+              <a:rPr lang="en-US" sz="1104" dirty="0">
                 <a:solidFill>
                   <a:srgbClr val="000000"/>
                 </a:solidFill>
@@ -552,7 +552,7 @@
               </a:spcAft>
             </a:pPr>
             <a:r>
-              <a:rPr lang="en-US" sz="1309" dirty="0">
+              <a:rPr lang="en-US" sz="1104" dirty="0">
                 <a:solidFill>
                   <a:srgbClr val="000000"/>
                 </a:solidFill>
@@ -570,8 +570,8 @@
         </p:nvSpPr>
         <p:spPr>
           <a:xfrm>
-            <a:off x="4214632" y="2921402"/>
-            <a:ext cx="1813367" cy="1382692"/>
+            <a:off x="2387942" y="3045681"/>
+            <a:ext cx="1529301" cy="1166092"/>
           </a:xfrm>
           <a:prstGeom prst="rect">
             <a:avLst/>
@@ -596,7 +596,7 @@
               </a:spcAft>
             </a:pPr>
             <a:r>
-              <a:rPr lang="en-US" sz="1309" dirty="0">
+              <a:rPr lang="en-US" sz="1104" dirty="0">
                 <a:solidFill>
                   <a:srgbClr val="000000"/>
                 </a:solidFill>
@@ -614,7 +614,7 @@
               </a:spcAft>
             </a:pPr>
             <a:r>
-              <a:rPr lang="en-US" sz="1309" dirty="0">
+              <a:rPr lang="en-US" sz="1104" dirty="0">
                 <a:solidFill>
                   <a:srgbClr val="000000"/>
                 </a:solidFill>
@@ -632,7 +632,7 @@
               </a:spcAft>
             </a:pPr>
             <a:r>
-              <a:rPr lang="en-US" sz="1309" dirty="0">
+              <a:rPr lang="en-US" sz="1104" dirty="0">
                 <a:solidFill>
                   <a:srgbClr val="000000"/>
                 </a:solidFill>
@@ -650,7 +650,7 @@
               </a:spcAft>
             </a:pPr>
             <a:r>
-              <a:rPr lang="en-US" sz="1309" dirty="0">
+              <a:rPr lang="en-US" sz="1104" dirty="0">
                 <a:solidFill>
                   <a:srgbClr val="000000"/>
                 </a:solidFill>
@@ -668,7 +668,7 @@
               </a:spcAft>
             </a:pPr>
             <a:r>
-              <a:rPr lang="en-US" sz="1309" dirty="0">
+              <a:rPr lang="en-US" sz="1104" dirty="0">
                 <a:solidFill>
                   <a:srgbClr val="000000"/>
                 </a:solidFill>
@@ -686,7 +686,7 @@
               </a:spcAft>
             </a:pPr>
             <a:r>
-              <a:rPr lang="en-US" sz="1309" dirty="0">
+              <a:rPr lang="en-US" sz="1104" dirty="0">
                 <a:solidFill>
                   <a:srgbClr val="000000"/>
                 </a:solidFill>
@@ -704,8 +704,8 @@
         </p:nvSpPr>
         <p:spPr>
           <a:xfrm>
-            <a:off x="6164001" y="2921402"/>
-            <a:ext cx="1813367" cy="1190022"/>
+            <a:off x="4031941" y="3045681"/>
+            <a:ext cx="1529301" cy="1003604"/>
           </a:xfrm>
           <a:prstGeom prst="rect">
             <a:avLst/>
@@ -730,7 +730,7 @@
               </a:spcAft>
             </a:pPr>
             <a:r>
-              <a:rPr lang="en-US" sz="1309" dirty="0">
+              <a:rPr lang="en-US" sz="1104" dirty="0">
                 <a:solidFill>
                   <a:srgbClr val="000000"/>
                 </a:solidFill>
@@ -748,7 +748,7 @@
               </a:spcAft>
             </a:pPr>
             <a:r>
-              <a:rPr lang="en-US" sz="1309" dirty="0">
+              <a:rPr lang="en-US" sz="1104" dirty="0">
                 <a:solidFill>
                   <a:srgbClr val="000000"/>
                 </a:solidFill>
@@ -766,7 +766,7 @@
               </a:spcAft>
             </a:pPr>
             <a:r>
-              <a:rPr lang="en-US" sz="1309" dirty="0">
+              <a:rPr lang="en-US" sz="1104" dirty="0">
                 <a:solidFill>
                   <a:srgbClr val="000000"/>
                 </a:solidFill>
@@ -784,7 +784,7 @@
               </a:spcAft>
             </a:pPr>
             <a:r>
-              <a:rPr lang="en-US" sz="1309" dirty="0">
+              <a:rPr lang="en-US" sz="1104" dirty="0">
                 <a:solidFill>
                   <a:srgbClr val="000000"/>
                 </a:solidFill>
@@ -802,7 +802,7 @@
               </a:spcAft>
             </a:pPr>
             <a:r>
-              <a:rPr lang="en-US" sz="1309" dirty="0">
+              <a:rPr lang="en-US" sz="1104" dirty="0">
                 <a:solidFill>
                   <a:srgbClr val="000000"/>
                 </a:solidFill>
@@ -820,8 +820,8 @@
         </p:nvSpPr>
         <p:spPr>
           <a:xfrm>
-            <a:off x="6164001" y="4202092"/>
-            <a:ext cx="1813367" cy="997352"/>
+            <a:off x="4031941" y="4125750"/>
+            <a:ext cx="1529301" cy="841115"/>
           </a:xfrm>
           <a:prstGeom prst="rect">
             <a:avLst/>
@@ -846,7 +846,7 @@
               </a:spcAft>
             </a:pPr>
             <a:r>
-              <a:rPr lang="en-US" sz="1309" dirty="0">
+              <a:rPr lang="en-US" sz="1104" dirty="0">
                 <a:solidFill>
                   <a:srgbClr val="000000"/>
                 </a:solidFill>
@@ -864,7 +864,7 @@
               </a:spcAft>
             </a:pPr>
             <a:r>
-              <a:rPr lang="en-US" sz="1309" dirty="0">
+              <a:rPr lang="en-US" sz="1104" dirty="0">
                 <a:solidFill>
                   <a:srgbClr val="000000"/>
                 </a:solidFill>
@@ -882,7 +882,7 @@
               </a:spcAft>
             </a:pPr>
             <a:r>
-              <a:rPr lang="en-US" sz="1309" dirty="0">
+              <a:rPr lang="en-US" sz="1104" dirty="0">
                 <a:solidFill>
                   <a:srgbClr val="000000"/>
                 </a:solidFill>
@@ -900,7 +900,7 @@
               </a:spcAft>
             </a:pPr>
             <a:r>
-              <a:rPr lang="en-US" sz="1309" dirty="0">
+              <a:rPr lang="en-US" sz="1104" dirty="0">
                 <a:solidFill>
                   <a:srgbClr val="000000"/>
                 </a:solidFill>
@@ -918,8 +918,8 @@
         </p:nvSpPr>
         <p:spPr>
           <a:xfrm>
-            <a:off x="8113371" y="2921402"/>
-            <a:ext cx="1813367" cy="1575363"/>
+            <a:off x="5675939" y="3045681"/>
+            <a:ext cx="1529301" cy="1328580"/>
           </a:xfrm>
           <a:prstGeom prst="rect">
             <a:avLst/>
@@ -944,7 +944,7 @@
               </a:spcAft>
             </a:pPr>
             <a:r>
-              <a:rPr lang="en-US" sz="1309" dirty="0">
+              <a:rPr lang="en-US" sz="1104" dirty="0">
                 <a:solidFill>
                   <a:srgbClr val="000000"/>
                 </a:solidFill>
@@ -962,7 +962,7 @@
               </a:spcAft>
             </a:pPr>
             <a:r>
-              <a:rPr lang="en-US" sz="1309" dirty="0">
+              <a:rPr lang="en-US" sz="1104" dirty="0">
                 <a:solidFill>
                   <a:srgbClr val="000000"/>
                 </a:solidFill>
@@ -980,7 +980,7 @@
               </a:spcAft>
             </a:pPr>
             <a:r>
-              <a:rPr lang="en-US" sz="1309" dirty="0">
+              <a:rPr lang="en-US" sz="1104" dirty="0">
                 <a:solidFill>
                   <a:srgbClr val="000000"/>
                 </a:solidFill>
@@ -998,7 +998,7 @@
               </a:spcAft>
             </a:pPr>
             <a:r>
-              <a:rPr lang="en-US" sz="1309" dirty="0">
+              <a:rPr lang="en-US" sz="1104" dirty="0">
                 <a:solidFill>
                   <a:srgbClr val="000000"/>
                 </a:solidFill>
@@ -1016,7 +1016,7 @@
               </a:spcAft>
             </a:pPr>
             <a:r>
-              <a:rPr lang="en-US" sz="1309" dirty="0">
+              <a:rPr lang="en-US" sz="1104" dirty="0">
                 <a:solidFill>
                   <a:srgbClr val="000000"/>
                 </a:solidFill>
@@ -1034,7 +1034,7 @@
               </a:spcAft>
             </a:pPr>
             <a:r>
-              <a:rPr lang="en-US" sz="1309" dirty="0">
+              <a:rPr lang="en-US" sz="1104" dirty="0">
                 <a:solidFill>
                   <a:srgbClr val="000000"/>
                 </a:solidFill>
@@ -1052,7 +1052,7 @@
               </a:spcAft>
             </a:pPr>
             <a:r>
-              <a:rPr lang="en-US" sz="1309" dirty="0">
+              <a:rPr lang="en-US" sz="1104" dirty="0">
                 <a:solidFill>
                   <a:srgbClr val="000000"/>
                 </a:solidFill>
@@ -1070,8 +1070,8 @@
         </p:nvSpPr>
         <p:spPr>
           <a:xfrm>
-            <a:off x="8113371" y="4587433"/>
-            <a:ext cx="1813367" cy="1382692"/>
+            <a:off x="5675939" y="4450726"/>
+            <a:ext cx="1529301" cy="1166092"/>
           </a:xfrm>
           <a:prstGeom prst="rect">
             <a:avLst/>
@@ -1096,7 +1096,7 @@
               </a:spcAft>
             </a:pPr>
             <a:r>
-              <a:rPr lang="en-US" sz="1309" dirty="0">
+              <a:rPr lang="en-US" sz="1104" dirty="0">
                 <a:solidFill>
                   <a:srgbClr val="000000"/>
                 </a:solidFill>
@@ -1114,7 +1114,7 @@
               </a:spcAft>
             </a:pPr>
             <a:r>
-              <a:rPr lang="en-US" sz="1309" dirty="0">
+              <a:rPr lang="en-US" sz="1104" dirty="0">
                 <a:solidFill>
                   <a:srgbClr val="000000"/>
                 </a:solidFill>
@@ -1132,7 +1132,7 @@
               </a:spcAft>
             </a:pPr>
             <a:r>
-              <a:rPr lang="en-US" sz="1309" dirty="0">
+              <a:rPr lang="en-US" sz="1104" dirty="0">
                 <a:solidFill>
                   <a:srgbClr val="000000"/>
                 </a:solidFill>
@@ -1150,7 +1150,7 @@
               </a:spcAft>
             </a:pPr>
             <a:r>
-              <a:rPr lang="en-US" sz="1309" dirty="0">
+              <a:rPr lang="en-US" sz="1104" dirty="0">
                 <a:solidFill>
                   <a:srgbClr val="000000"/>
                 </a:solidFill>
@@ -1168,7 +1168,7 @@
               </a:spcAft>
             </a:pPr>
             <a:r>
-              <a:rPr lang="en-US" sz="1309" dirty="0">
+              <a:rPr lang="en-US" sz="1104" dirty="0">
                 <a:solidFill>
                   <a:srgbClr val="000000"/>
                 </a:solidFill>
@@ -1186,12 +1186,172 @@
               </a:spcAft>
             </a:pPr>
             <a:r>
-              <a:rPr lang="en-US" sz="1309" dirty="0">
+              <a:rPr lang="en-US" sz="1104" dirty="0">
                 <a:solidFill>
                   <a:srgbClr val="000000"/>
                 </a:solidFill>
               </a:rPr>
               <a:t>be alive.</a:t>
+            </a:r>
+          </a:p>
+        </p:txBody>
+      </p:sp>
+      <p:sp>
+        <p:nvSpPr>
+          <p:cNvPr id="4" name="Mermaid source"/>
+          <p:cNvSpPr/>
+          <p:nvPr/>
+        </p:nvSpPr>
+        <p:spPr>
+          <a:xfrm>
+            <a:off x="7674864" y="1028700"/>
+            <a:ext cx="4059936" cy="5372100"/>
+          </a:xfrm>
+          <a:prstGeom prst="rect">
+            <a:avLst/>
+          </a:prstGeom>
+          <a:solidFill>
+            <a:srgbClr val="F3F4F6"/>
+          </a:solidFill>
+          <a:ln w="9525">
+            <a:solidFill>
+              <a:srgbClr val="D1D5DB"/>
+            </a:solidFill>
+          </a:ln>
+        </p:spPr>
+        <p:txBody>
+          <a:bodyPr wrap="square" lIns="91440" tIns="45720" rIns="91440" bIns="45720" anchor="t">
+            <a:noAutofit/>
+          </a:bodyPr>
+          <a:lstStyle/>
+          <a:p>
+            <a:pPr algn="l"/>
+            <a:r>
+              <a:rPr lang="en-US" sz="1300" dirty="0">
+                <a:solidFill>
+                  <a:srgbClr val="1F2937"/>
+                </a:solidFill>
+                <a:latin typeface="Consolas"/>
+                <a:cs typeface="Consolas"/>
+              </a:rPr>
+              <a:t>timeline</a:t>
+            </a:r>
+          </a:p>
+          <a:p>
+            <a:pPr algn="l"/>
+            <a:r>
+              <a:rPr lang="en-US" sz="1300" dirty="0">
+                <a:solidFill>
+                  <a:srgbClr val="1F2937"/>
+                </a:solidFill>
+                <a:latin typeface="Consolas"/>
+                <a:cs typeface="Consolas"/>
+              </a:rPr>
+              <a:t>        title England's History Timeline</a:t>
+            </a:r>
+          </a:p>
+          <a:p>
+            <a:pPr algn="l"/>
+            <a:r>
+              <a:rPr lang="en-US" sz="1300" dirty="0">
+                <a:solidFill>
+                  <a:srgbClr val="1F2937"/>
+                </a:solidFill>
+                <a:latin typeface="Consolas"/>
+                <a:cs typeface="Consolas"/>
+              </a:rPr>
+              <a:t>        section Stone Age</a:t>
+            </a:r>
+          </a:p>
+          <a:p>
+            <a:pPr algn="l"/>
+            <a:r>
+              <a:rPr lang="en-US" sz="1300" dirty="0">
+                <a:solidFill>
+                  <a:srgbClr val="1F2937"/>
+                </a:solidFill>
+                <a:latin typeface="Consolas"/>
+                <a:cs typeface="Consolas"/>
+              </a:rPr>
+              <a:t>          7600 BC : Britain's oldest known house was built in Orkney, Scotland</a:t>
+            </a:r>
+          </a:p>
+          <a:p>
+            <a:pPr algn="l"/>
+            <a:r>
+              <a:rPr lang="en-US" sz="1300" dirty="0">
+                <a:solidFill>
+                  <a:srgbClr val="1F2937"/>
+                </a:solidFill>
+                <a:latin typeface="Consolas"/>
+                <a:cs typeface="Consolas"/>
+              </a:rPr>
+              <a:t>          6000 BC : Sea levels rise and Britain becomes an island.&lt;br&gt; The people who live here are hunter-gatherers.</a:t>
+            </a:r>
+          </a:p>
+          <a:p>
+            <a:pPr algn="l"/>
+            <a:r>
+              <a:rPr lang="en-US" sz="1300" dirty="0">
+                <a:solidFill>
+                  <a:srgbClr val="1F2937"/>
+                </a:solidFill>
+                <a:latin typeface="Consolas"/>
+                <a:cs typeface="Consolas"/>
+              </a:rPr>
+              <a:t>        section Bronze Age</a:t>
+            </a:r>
+          </a:p>
+          <a:p>
+            <a:pPr algn="l"/>
+            <a:r>
+              <a:rPr lang="en-US" sz="1300" dirty="0">
+                <a:solidFill>
+                  <a:srgbClr val="1F2937"/>
+                </a:solidFill>
+                <a:latin typeface="Consolas"/>
+                <a:cs typeface="Consolas"/>
+              </a:rPr>
+              <a:t>          2300 BC : People arrive from Europe and settle in Britain. &lt;br&gt;They bring farming and metalworking.</a:t>
+            </a:r>
+          </a:p>
+          <a:p>
+            <a:pPr algn="l"/>
+            <a:r>
+              <a:rPr lang="en-US" sz="1300" dirty="0">
+                <a:solidFill>
+                  <a:srgbClr val="1F2937"/>
+                </a:solidFill>
+                <a:latin typeface="Consolas"/>
+                <a:cs typeface="Consolas"/>
+              </a:rPr>
+              <a:t>                  : New styles of pottery and ways of burying the dead appear.</a:t>
+            </a:r>
+          </a:p>
+          <a:p>
+            <a:pPr algn="l"/>
+            <a:r>
+              <a:rPr lang="en-US" sz="1300" dirty="0">
+                <a:solidFill>
+                  <a:srgbClr val="1F2937"/>
+                </a:solidFill>
+                <a:latin typeface="Consolas"/>
+                <a:cs typeface="Consolas"/>
+              </a:rPr>
+              <a:t>          2200 BC : The last major building works are completed at Stonehenge.&lt;br&gt; People now bury their dead in stone circles.</a:t>
+            </a:r>
+          </a:p>
+          <a:p>
+            <a:pPr algn="l"/>
+            <a:r>
+              <a:rPr lang="en-US" sz="1300" dirty="0">
+                <a:solidFill>
+                  <a:srgbClr val="1F2937"/>
+                </a:solidFill>
+                <a:latin typeface="Consolas"/>
+                <a:cs typeface="Consolas"/>
+              </a:rPr>
+              <a:t>                  : The first metal objects are made in Britain.Some other nice things happen. it is a good time to be alive.</a:t>
             </a:r>
           </a:p>
         </p:txBody>
